--- a/Story Board - Agile2025 Hackathon for good.pptx
+++ b/Story Board - Agile2025 Hackathon for good.pptx
@@ -256,7 +256,7 @@
           <a:p>
             <a:fld id="{2C48CAB2-D4F5-DA46-9FCD-78882F7254BF}" type="datetimeFigureOut">
               <a:rPr lang="en-US" smtClean="0"/>
-              <a:t>8/29/25</a:t>
+              <a:t>9/10/25</a:t>
             </a:fld>
             <a:endParaRPr lang="en-US"/>
           </a:p>
@@ -2677,7 +2677,7 @@
             <a:fld id="{B61BEF0D-F0BB-DE4B-95CE-6DB70DBA9567}" type="datetimeFigureOut">
               <a:rPr lang="en-US" smtClean="0"/>
               <a:pPr/>
-              <a:t>8/29/25</a:t>
+              <a:t>9/10/25</a:t>
             </a:fld>
             <a:endParaRPr lang="en-US" dirty="0"/>
           </a:p>
@@ -2900,7 +2900,7 @@
             <a:fld id="{B61BEF0D-F0BB-DE4B-95CE-6DB70DBA9567}" type="datetimeFigureOut">
               <a:rPr lang="en-US" smtClean="0"/>
               <a:pPr/>
-              <a:t>8/29/25</a:t>
+              <a:t>9/10/25</a:t>
             </a:fld>
             <a:endParaRPr lang="en-US" dirty="0"/>
           </a:p>
